--- a/m1/diapositivos/aula-11-promessa-do-cronista.pptx
+++ b/m1/diapositivos/aula-11-promessa-do-cronista.pptx
@@ -7178,7 +7178,7 @@
         <p:spPr>
           <a:xfrm>
             <a:off x="1005840" y="2697480"/>
-            <a:ext cx="0" cy="2753868"/>
+            <a:ext cx="0" cy="2404618"/>
           </a:xfrm>
           <a:prstGeom prst="line">
             <a:avLst/>
@@ -7265,7 +7265,7 @@
         <p:spPr>
           <a:xfrm>
             <a:off x="1417320" y="2523744"/>
-            <a:ext cx="9174175" cy="1267206"/>
+            <a:ext cx="9174175" cy="917956"/>
           </a:xfrm>
           <a:prstGeom prst="rect">
             <a:avLst/>
@@ -7294,7 +7294,7 @@
                 <a:ea typeface="Arial" pitchFamily="34" charset="-122"/>
                 <a:cs typeface="Arial" pitchFamily="34" charset="-120"/>
               </a:rPr>
-              <a:t>Que o grito foi dado, ao galope e em altas vozes, e que estava combinado: o texto di-lo com «segundo já era percebido»</a:t>
+              <a:t>Que o grito foi dado em altas vozes e que já estava combinado</a:t>
             </a:r>
             <a:endParaRPr lang="en-US" sz="2200" dirty="0"/>
           </a:p>
@@ -7308,7 +7308,7 @@
         </p:nvSpPr>
         <p:spPr>
           <a:xfrm>
-            <a:off x="822960" y="3781806"/>
+            <a:off x="822960" y="3432556"/>
             <a:ext cx="365760" cy="365760"/>
           </a:xfrm>
           <a:prstGeom prst="ellipse">
@@ -7333,7 +7333,7 @@
         </p:nvSpPr>
         <p:spPr>
           <a:xfrm>
-            <a:off x="822960" y="3781806"/>
+            <a:off x="822960" y="3432556"/>
             <a:ext cx="365760" cy="365760"/>
           </a:xfrm>
           <a:prstGeom prst="rect">
@@ -7372,7 +7372,7 @@
         </p:nvSpPr>
         <p:spPr>
           <a:xfrm>
-            <a:off x="1417320" y="3790950"/>
+            <a:off x="1417320" y="3441700"/>
             <a:ext cx="9174175" cy="568706"/>
           </a:xfrm>
           <a:prstGeom prst="rect">
@@ -7416,7 +7416,7 @@
         </p:nvSpPr>
         <p:spPr>
           <a:xfrm>
-            <a:off x="822960" y="4350512"/>
+            <a:off x="822960" y="4001262"/>
             <a:ext cx="365760" cy="365760"/>
           </a:xfrm>
           <a:prstGeom prst="ellipse">
@@ -7441,7 +7441,7 @@
         </p:nvSpPr>
         <p:spPr>
           <a:xfrm>
-            <a:off x="822960" y="4350512"/>
+            <a:off x="822960" y="4001262"/>
             <a:ext cx="365760" cy="365760"/>
           </a:xfrm>
           <a:prstGeom prst="rect">
@@ -7480,7 +7480,7 @@
         </p:nvSpPr>
         <p:spPr>
           <a:xfrm>
-            <a:off x="1417320" y="4359656"/>
+            <a:off x="1417320" y="4010406"/>
             <a:ext cx="9174175" cy="917956"/>
           </a:xfrm>
           <a:prstGeom prst="rect">
@@ -7524,7 +7524,7 @@
         </p:nvSpPr>
         <p:spPr>
           <a:xfrm>
-            <a:off x="822960" y="5268468"/>
+            <a:off x="822960" y="4919218"/>
             <a:ext cx="365760" cy="365760"/>
           </a:xfrm>
           <a:prstGeom prst="ellipse">
@@ -7549,7 +7549,7 @@
         </p:nvSpPr>
         <p:spPr>
           <a:xfrm>
-            <a:off x="822960" y="5268468"/>
+            <a:off x="822960" y="4919218"/>
             <a:ext cx="365760" cy="365760"/>
           </a:xfrm>
           <a:prstGeom prst="rect">
@@ -7588,8 +7588,8 @@
         </p:nvSpPr>
         <p:spPr>
           <a:xfrm>
-            <a:off x="1417320" y="5277612"/>
-            <a:ext cx="9174175" cy="568706"/>
+            <a:off x="1417320" y="4928362"/>
+            <a:ext cx="9174175" cy="917956"/>
           </a:xfrm>
           <a:prstGeom prst="rect">
             <a:avLst/>
@@ -7618,7 +7618,7 @@
                 <a:ea typeface="Arial" pitchFamily="34" charset="-122"/>
                 <a:cs typeface="Arial" pitchFamily="34" charset="-120"/>
               </a:rPr>
-              <a:t>Que o cronista não sabe se o grito chegou a ser dado</a:t>
+              <a:t>Que o cronista não sabe se o grito chegou mesmo a ser dado</a:t>
             </a:r>
             <a:endParaRPr lang="en-US" sz="2200" dirty="0"/>
           </a:p>
@@ -7861,7 +7861,7 @@
               <a:buNone/>
             </a:pPr>
             <a:r>
-              <a:rPr lang="en-US" sz="2800" b="1" dirty="0">
+              <a:rPr lang="en-US" sz="3400" b="1" dirty="0">
                 <a:solidFill>
                   <a:srgbClr val="F2F0EA"/>
                 </a:solidFill>
@@ -7869,9 +7869,9 @@
                 <a:ea typeface="Arial" pitchFamily="34" charset="-122"/>
                 <a:cs typeface="Arial" pitchFamily="34" charset="-120"/>
               </a:rPr>
-              <a:t>Que o grito foi dado, ao galope e em altas vozes, e que estava combinado: o texto di-lo com «segundo já era percebido»</a:t>
-            </a:r>
-            <a:endParaRPr lang="en-US" sz="2800" dirty="0"/>
+              <a:t>Que o grito foi dado em altas vozes e que já estava combinado</a:t>
+            </a:r>
+            <a:endParaRPr lang="en-US" sz="3400" dirty="0"/>
           </a:p>
         </p:txBody>
       </p:sp>
@@ -7938,7 +7938,7 @@
                 <a:ea typeface="Georgia" pitchFamily="34" charset="-122"/>
                 <a:cs typeface="Georgia" pitchFamily="34" charset="-120"/>
               </a:rPr>
-              <a:t>O cronista conta duas verdades ao mesmo tempo: o grito, com galope e vozes, e o facto de ter sido combinado. Quem lê fica a saber o que a rua não sabia. Não diz que matavam o Mestre: foi o Mestre quem matou o conde. Não diz que o pajem agiu por medo nem mostra dúvida sobre o grito. Repetir uma mentira dizendo que é mentira não é mentir: é mostrar como se fez.</a:t>
+              <a:t>O cronista conta duas verdades ao mesmo tempo: o grito, com galope e vozes, e o facto de ter sido combinado, «segundo já era percebido». Quem lê fica a saber o que a rua não sabia. Não diz que matavam o Mestre: foi o Mestre quem matou o conde. Não diz que o pajem agiu por medo nem mostra dúvida sobre o grito. Repetir uma mentira dizendo que é mentira não é mentir: é mostrar como se fez.</a:t>
             </a:r>
             <a:endParaRPr lang="en-US" sz="2200" dirty="0"/>
           </a:p>
@@ -20408,7 +20408,7 @@
         <p:spPr>
           <a:xfrm>
             <a:off x="1005840" y="2697480"/>
-            <a:ext cx="0" cy="2563368"/>
+            <a:ext cx="0" cy="1801368"/>
           </a:xfrm>
           <a:prstGeom prst="line">
             <a:avLst/>
@@ -20495,7 +20495,7 @@
         <p:spPr>
           <a:xfrm>
             <a:off x="1417320" y="2523744"/>
-            <a:ext cx="9174175" cy="981456"/>
+            <a:ext cx="9174175" cy="600456"/>
           </a:xfrm>
           <a:prstGeom prst="rect">
             <a:avLst/>
@@ -20524,7 +20524,7 @@
                 <a:ea typeface="Arial" pitchFamily="34" charset="-122"/>
                 <a:cs typeface="Arial" pitchFamily="34" charset="-120"/>
               </a:rPr>
-              <a:t>A afeição por um dos lados e o louvor fingido: o que faria da crónica um elogio</a:t>
+              <a:t>A afeição por um dos lados e o louvor fingido</a:t>
             </a:r>
             <a:endParaRPr lang="en-US" sz="2400" dirty="0"/>
           </a:p>
@@ -20538,7 +20538,7 @@
         </p:nvSpPr>
         <p:spPr>
           <a:xfrm>
-            <a:off x="822960" y="3496056"/>
+            <a:off x="822960" y="3115056"/>
             <a:ext cx="365760" cy="365760"/>
           </a:xfrm>
           <a:prstGeom prst="ellipse">
@@ -20563,7 +20563,7 @@
         </p:nvSpPr>
         <p:spPr>
           <a:xfrm>
-            <a:off x="822960" y="3496056"/>
+            <a:off x="822960" y="3115056"/>
             <a:ext cx="365760" cy="365760"/>
           </a:xfrm>
           <a:prstGeom prst="rect">
@@ -20602,8 +20602,8 @@
         </p:nvSpPr>
         <p:spPr>
           <a:xfrm>
-            <a:off x="1417320" y="3505200"/>
-            <a:ext cx="9174175" cy="981456"/>
+            <a:off x="1417320" y="3124200"/>
+            <a:ext cx="9174175" cy="600456"/>
           </a:xfrm>
           <a:prstGeom prst="rect">
             <a:avLst/>
@@ -20632,7 +20632,7 @@
                 <a:ea typeface="Arial" pitchFamily="34" charset="-122"/>
                 <a:cs typeface="Arial" pitchFamily="34" charset="-120"/>
               </a:rPr>
-              <a:t>Os pormenores concretos, como o galope e o grão de trigo</a:t>
+              <a:t>Os pormenores, como o galope e o grão de trigo</a:t>
             </a:r>
             <a:endParaRPr lang="en-US" sz="2400" dirty="0"/>
           </a:p>
@@ -20646,7 +20646,7 @@
         </p:nvSpPr>
         <p:spPr>
           <a:xfrm>
-            <a:off x="822960" y="4477512"/>
+            <a:off x="822960" y="3715512"/>
             <a:ext cx="365760" cy="365760"/>
           </a:xfrm>
           <a:prstGeom prst="ellipse">
@@ -20671,7 +20671,7 @@
         </p:nvSpPr>
         <p:spPr>
           <a:xfrm>
-            <a:off x="822960" y="4477512"/>
+            <a:off x="822960" y="3715512"/>
             <a:ext cx="365760" cy="365760"/>
           </a:xfrm>
           <a:prstGeom prst="rect">
@@ -20710,7 +20710,7 @@
         </p:nvSpPr>
         <p:spPr>
           <a:xfrm>
-            <a:off x="1417320" y="4486656"/>
+            <a:off x="1417320" y="3724656"/>
             <a:ext cx="9174175" cy="600456"/>
           </a:xfrm>
           <a:prstGeom prst="rect">
@@ -20754,7 +20754,7 @@
         </p:nvSpPr>
         <p:spPr>
           <a:xfrm>
-            <a:off x="822960" y="5077968"/>
+            <a:off x="822960" y="4315968"/>
             <a:ext cx="365760" cy="365760"/>
           </a:xfrm>
           <a:prstGeom prst="ellipse">
@@ -20779,7 +20779,7 @@
         </p:nvSpPr>
         <p:spPr>
           <a:xfrm>
-            <a:off x="822960" y="5077968"/>
+            <a:off x="822960" y="4315968"/>
             <a:ext cx="365760" cy="365760"/>
           </a:xfrm>
           <a:prstGeom prst="rect">
@@ -20818,7 +20818,7 @@
         </p:nvSpPr>
         <p:spPr>
           <a:xfrm>
-            <a:off x="1417320" y="5087112"/>
+            <a:off x="1417320" y="4325112"/>
             <a:ext cx="9174175" cy="600456"/>
           </a:xfrm>
           <a:prstGeom prst="rect">
@@ -20848,7 +20848,7 @@
                 <a:ea typeface="Arial" pitchFamily="34" charset="-122"/>
                 <a:cs typeface="Arial" pitchFamily="34" charset="-120"/>
               </a:rPr>
-              <a:t>Os números, como o preço do alqueire</a:t>
+              <a:t>Os números, como o preço do alqueire de trigo</a:t>
             </a:r>
             <a:endParaRPr lang="en-US" sz="2400" dirty="0"/>
           </a:p>
@@ -21099,7 +21099,7 @@
                 <a:ea typeface="Arial" pitchFamily="34" charset="-122"/>
                 <a:cs typeface="Arial" pitchFamily="34" charset="-120"/>
               </a:rPr>
-              <a:t>A afeição por um dos lados e o louvor fingido: o que faria da crónica um elogio</a:t>
+              <a:t>A afeição por um dos lados e o louvor fingido</a:t>
             </a:r>
             <a:endParaRPr lang="en-US" sz="3400" dirty="0"/>
           </a:p>
@@ -23035,7 +23035,7 @@
                 <a:ea typeface="Arial" pitchFamily="34" charset="-122"/>
                 <a:cs typeface="Arial" pitchFamily="34" charset="-120"/>
               </a:rPr>
-              <a:t>Escrever verdade sem louvor fingido, pondo de parte a afeição, depois de ver livros e escrituras de cartórios</a:t>
+              <a:t>Escrever verdade sem afeição nem louvor fingido, a partir de escrituras</a:t>
             </a:r>
             <a:endParaRPr lang="en-US" sz="2000" dirty="0"/>
           </a:p>
@@ -25018,7 +25018,7 @@
               <a:buNone/>
             </a:pPr>
             <a:r>
-              <a:rPr lang="en-US" sz="2800" b="1" dirty="0">
+              <a:rPr lang="en-US" sz="3400" b="1" dirty="0">
                 <a:solidFill>
                   <a:srgbClr val="F2F0EA"/>
                 </a:solidFill>
@@ -25026,9 +25026,9 @@
                 <a:ea typeface="Arial" pitchFamily="34" charset="-122"/>
                 <a:cs typeface="Arial" pitchFamily="34" charset="-120"/>
               </a:rPr>
-              <a:t>Escrever verdade sem louvor fingido, pondo de parte a afeição, depois de ver livros e escrituras de cartórios</a:t>
-            </a:r>
-            <a:endParaRPr lang="en-US" sz="2800" dirty="0"/>
+              <a:t>Escrever verdade sem afeição nem louvor fingido, a partir de escrituras</a:t>
+            </a:r>
+            <a:endParaRPr lang="en-US" sz="3400" dirty="0"/>
           </a:p>
         </p:txBody>
       </p:sp>
